--- a/activity/M02A09/M02A09.pptx
+++ b/activity/M02A09/M02A09.pptx
@@ -226,7 +226,7 @@
             <a:fld id="{53CE91DE-ABC6-4D22-89A0-1765B629FB43}" type="datetimeFigureOut">
               <a:rPr lang="es-CO" smtClean="0"/>
               <a:pPr/>
-              <a:t>31/07/2025</a:t>
+              <a:t>21/11/2025</a:t>
             </a:fld>
             <a:endParaRPr lang="es-CO"/>
           </a:p>
@@ -679,7 +679,7 @@
             <a:fld id="{43DF08CB-A55A-40B1-AEFD-F19B3CFD19B5}" type="datetimeFigureOut">
               <a:rPr lang="es-CO" smtClean="0"/>
               <a:pPr/>
-              <a:t>31/07/2025</a:t>
+              <a:t>21/11/2025</a:t>
             </a:fld>
             <a:endParaRPr lang="es-CO"/>
           </a:p>
@@ -846,7 +846,7 @@
             <a:fld id="{43DF08CB-A55A-40B1-AEFD-F19B3CFD19B5}" type="datetimeFigureOut">
               <a:rPr lang="es-CO" smtClean="0"/>
               <a:pPr/>
-              <a:t>31/07/2025</a:t>
+              <a:t>21/11/2025</a:t>
             </a:fld>
             <a:endParaRPr lang="es-CO"/>
           </a:p>
@@ -1023,7 +1023,7 @@
             <a:fld id="{43DF08CB-A55A-40B1-AEFD-F19B3CFD19B5}" type="datetimeFigureOut">
               <a:rPr lang="es-CO" smtClean="0"/>
               <a:pPr/>
-              <a:t>31/07/2025</a:t>
+              <a:t>21/11/2025</a:t>
             </a:fld>
             <a:endParaRPr lang="es-CO"/>
           </a:p>
@@ -1190,7 +1190,7 @@
             <a:fld id="{43DF08CB-A55A-40B1-AEFD-F19B3CFD19B5}" type="datetimeFigureOut">
               <a:rPr lang="es-CO" smtClean="0"/>
               <a:pPr/>
-              <a:t>31/07/2025</a:t>
+              <a:t>21/11/2025</a:t>
             </a:fld>
             <a:endParaRPr lang="es-CO"/>
           </a:p>
@@ -1433,7 +1433,7 @@
             <a:fld id="{43DF08CB-A55A-40B1-AEFD-F19B3CFD19B5}" type="datetimeFigureOut">
               <a:rPr lang="es-CO" smtClean="0"/>
               <a:pPr/>
-              <a:t>31/07/2025</a:t>
+              <a:t>21/11/2025</a:t>
             </a:fld>
             <a:endParaRPr lang="es-CO"/>
           </a:p>
@@ -1718,7 +1718,7 @@
             <a:fld id="{43DF08CB-A55A-40B1-AEFD-F19B3CFD19B5}" type="datetimeFigureOut">
               <a:rPr lang="es-CO" smtClean="0"/>
               <a:pPr/>
-              <a:t>31/07/2025</a:t>
+              <a:t>21/11/2025</a:t>
             </a:fld>
             <a:endParaRPr lang="es-CO"/>
           </a:p>
@@ -2137,7 +2137,7 @@
             <a:fld id="{43DF08CB-A55A-40B1-AEFD-F19B3CFD19B5}" type="datetimeFigureOut">
               <a:rPr lang="es-CO" smtClean="0"/>
               <a:pPr/>
-              <a:t>31/07/2025</a:t>
+              <a:t>21/11/2025</a:t>
             </a:fld>
             <a:endParaRPr lang="es-CO"/>
           </a:p>
@@ -2252,7 +2252,7 @@
             <a:fld id="{43DF08CB-A55A-40B1-AEFD-F19B3CFD19B5}" type="datetimeFigureOut">
               <a:rPr lang="es-CO" smtClean="0"/>
               <a:pPr/>
-              <a:t>31/07/2025</a:t>
+              <a:t>21/11/2025</a:t>
             </a:fld>
             <a:endParaRPr lang="es-CO"/>
           </a:p>
@@ -2344,7 +2344,7 @@
             <a:fld id="{43DF08CB-A55A-40B1-AEFD-F19B3CFD19B5}" type="datetimeFigureOut">
               <a:rPr lang="es-CO" smtClean="0"/>
               <a:pPr/>
-              <a:t>31/07/2025</a:t>
+              <a:t>21/11/2025</a:t>
             </a:fld>
             <a:endParaRPr lang="es-CO"/>
           </a:p>
@@ -2618,7 +2618,7 @@
             <a:fld id="{43DF08CB-A55A-40B1-AEFD-F19B3CFD19B5}" type="datetimeFigureOut">
               <a:rPr lang="es-CO" smtClean="0"/>
               <a:pPr/>
-              <a:t>31/07/2025</a:t>
+              <a:t>21/11/2025</a:t>
             </a:fld>
             <a:endParaRPr lang="es-CO"/>
           </a:p>
@@ -2868,7 +2868,7 @@
             <a:fld id="{43DF08CB-A55A-40B1-AEFD-F19B3CFD19B5}" type="datetimeFigureOut">
               <a:rPr lang="es-CO" smtClean="0"/>
               <a:pPr/>
-              <a:t>31/07/2025</a:t>
+              <a:t>21/11/2025</a:t>
             </a:fld>
             <a:endParaRPr lang="es-CO"/>
           </a:p>
@@ -3081,7 +3081,7 @@
             <a:fld id="{43DF08CB-A55A-40B1-AEFD-F19B3CFD19B5}" type="datetimeFigureOut">
               <a:rPr lang="es-CO" smtClean="0"/>
               <a:pPr/>
-              <a:t>31/07/2025</a:t>
+              <a:t>21/11/2025</a:t>
             </a:fld>
             <a:endParaRPr lang="es-CO"/>
           </a:p>
